--- a/public/fun/cards/creative/creative-30.pptx
+++ b/public/fun/cards/creative/creative-30.pptx
@@ -3085,7 +3085,7 @@
     <p:bg>
       <p:bgPr>
         <a:solidFill>
-          <a:srgbClr val="FDF3ED"/>
+          <a:srgbClr val="0E1116"/>
         </a:solidFill>
         <a:effectLst/>
       </p:bgPr>
@@ -3099,692 +3099,14 @@
       <p:grpSpPr/>
       <p:sp>
         <p:nvSpPr>
-          <p:cNvPr id="2" name="Oval 1"/>
-          <p:cNvSpPr/>
+          <p:cNvPr id="2" name="텍스트"/>
+          <p:cNvSpPr txBox="1"/>
           <p:nvPr/>
         </p:nvSpPr>
         <p:spPr>
           <a:xfrm>
-            <a:off x="2462400" y="158400"/>
-            <a:ext cx="43200" cy="43200"/>
-          </a:xfrm>
-          <a:prstGeom prst="ellipse">
-            <a:avLst/>
-          </a:prstGeom>
-          <a:solidFill>
-            <a:srgbClr val="E36C1C">
-              <a:alpha val="70000"/>
-            </a:srgbClr>
-          </a:solidFill>
-          <a:ln>
-            <a:noFill/>
-          </a:ln>
-        </p:spPr>
-        <p:txBody>
-          <a:bodyPr rtlCol="0" anchor="ctr"/>
-          <a:lstStyle/>
-          <a:p>
-            <a:pPr algn="ctr"/>
-          </a:p>
-        </p:txBody>
-      </p:sp>
-      <p:sp>
-        <p:nvSpPr>
-          <p:cNvPr id="3" name="Oval 2"/>
-          <p:cNvSpPr/>
-          <p:nvPr/>
-        </p:nvSpPr>
-        <p:spPr>
-          <a:xfrm>
-            <a:off x="2462400" y="266400"/>
-            <a:ext cx="43200" cy="43200"/>
-          </a:xfrm>
-          <a:prstGeom prst="ellipse">
-            <a:avLst/>
-          </a:prstGeom>
-          <a:solidFill>
-            <a:srgbClr val="E36C1C">
-              <a:alpha val="57999"/>
-            </a:srgbClr>
-          </a:solidFill>
-          <a:ln>
-            <a:noFill/>
-          </a:ln>
-        </p:spPr>
-        <p:txBody>
-          <a:bodyPr rtlCol="0" anchor="ctr"/>
-          <a:lstStyle/>
-          <a:p>
-            <a:pPr algn="ctr"/>
-          </a:p>
-        </p:txBody>
-      </p:sp>
-      <p:sp>
-        <p:nvSpPr>
-          <p:cNvPr id="4" name="Oval 3"/>
-          <p:cNvSpPr/>
-          <p:nvPr/>
-        </p:nvSpPr>
-        <p:spPr>
-          <a:xfrm>
-            <a:off x="2462400" y="374400"/>
-            <a:ext cx="43200" cy="43200"/>
-          </a:xfrm>
-          <a:prstGeom prst="ellipse">
-            <a:avLst/>
-          </a:prstGeom>
-          <a:solidFill>
-            <a:srgbClr val="E36C1C">
-              <a:alpha val="46000"/>
-            </a:srgbClr>
-          </a:solidFill>
-          <a:ln>
-            <a:noFill/>
-          </a:ln>
-        </p:spPr>
-        <p:txBody>
-          <a:bodyPr rtlCol="0" anchor="ctr"/>
-          <a:lstStyle/>
-          <a:p>
-            <a:pPr algn="ctr"/>
-          </a:p>
-        </p:txBody>
-      </p:sp>
-      <p:sp>
-        <p:nvSpPr>
-          <p:cNvPr id="5" name="Oval 4"/>
-          <p:cNvSpPr/>
-          <p:nvPr/>
-        </p:nvSpPr>
-        <p:spPr>
-          <a:xfrm>
-            <a:off x="2462400" y="482400"/>
-            <a:ext cx="43200" cy="43200"/>
-          </a:xfrm>
-          <a:prstGeom prst="ellipse">
-            <a:avLst/>
-          </a:prstGeom>
-          <a:solidFill>
-            <a:srgbClr val="E36C1C">
-              <a:alpha val="34000"/>
-            </a:srgbClr>
-          </a:solidFill>
-          <a:ln>
-            <a:noFill/>
-          </a:ln>
-        </p:spPr>
-        <p:txBody>
-          <a:bodyPr rtlCol="0" anchor="ctr"/>
-          <a:lstStyle/>
-          <a:p>
-            <a:pPr algn="ctr"/>
-          </a:p>
-        </p:txBody>
-      </p:sp>
-      <p:sp>
-        <p:nvSpPr>
-          <p:cNvPr id="6" name="Oval 5"/>
-          <p:cNvSpPr/>
-          <p:nvPr/>
-        </p:nvSpPr>
-        <p:spPr>
-          <a:xfrm>
-            <a:off x="2570400" y="158400"/>
-            <a:ext cx="43200" cy="43200"/>
-          </a:xfrm>
-          <a:prstGeom prst="ellipse">
-            <a:avLst/>
-          </a:prstGeom>
-          <a:solidFill>
-            <a:srgbClr val="E36C1C">
-              <a:alpha val="70000"/>
-            </a:srgbClr>
-          </a:solidFill>
-          <a:ln>
-            <a:noFill/>
-          </a:ln>
-        </p:spPr>
-        <p:txBody>
-          <a:bodyPr rtlCol="0" anchor="ctr"/>
-          <a:lstStyle/>
-          <a:p>
-            <a:pPr algn="ctr"/>
-          </a:p>
-        </p:txBody>
-      </p:sp>
-      <p:sp>
-        <p:nvSpPr>
-          <p:cNvPr id="7" name="Oval 6"/>
-          <p:cNvSpPr/>
-          <p:nvPr/>
-        </p:nvSpPr>
-        <p:spPr>
-          <a:xfrm>
-            <a:off x="2570400" y="266400"/>
-            <a:ext cx="43200" cy="43200"/>
-          </a:xfrm>
-          <a:prstGeom prst="ellipse">
-            <a:avLst/>
-          </a:prstGeom>
-          <a:solidFill>
-            <a:srgbClr val="E36C1C">
-              <a:alpha val="57999"/>
-            </a:srgbClr>
-          </a:solidFill>
-          <a:ln>
-            <a:noFill/>
-          </a:ln>
-        </p:spPr>
-        <p:txBody>
-          <a:bodyPr rtlCol="0" anchor="ctr"/>
-          <a:lstStyle/>
-          <a:p>
-            <a:pPr algn="ctr"/>
-          </a:p>
-        </p:txBody>
-      </p:sp>
-      <p:sp>
-        <p:nvSpPr>
-          <p:cNvPr id="8" name="Oval 7"/>
-          <p:cNvSpPr/>
-          <p:nvPr/>
-        </p:nvSpPr>
-        <p:spPr>
-          <a:xfrm>
-            <a:off x="2570400" y="374400"/>
-            <a:ext cx="43200" cy="43200"/>
-          </a:xfrm>
-          <a:prstGeom prst="ellipse">
-            <a:avLst/>
-          </a:prstGeom>
-          <a:solidFill>
-            <a:srgbClr val="E36C1C">
-              <a:alpha val="46000"/>
-            </a:srgbClr>
-          </a:solidFill>
-          <a:ln>
-            <a:noFill/>
-          </a:ln>
-        </p:spPr>
-        <p:txBody>
-          <a:bodyPr rtlCol="0" anchor="ctr"/>
-          <a:lstStyle/>
-          <a:p>
-            <a:pPr algn="ctr"/>
-          </a:p>
-        </p:txBody>
-      </p:sp>
-      <p:sp>
-        <p:nvSpPr>
-          <p:cNvPr id="9" name="Oval 8"/>
-          <p:cNvSpPr/>
-          <p:nvPr/>
-        </p:nvSpPr>
-        <p:spPr>
-          <a:xfrm>
-            <a:off x="2570400" y="482400"/>
-            <a:ext cx="43200" cy="43200"/>
-          </a:xfrm>
-          <a:prstGeom prst="ellipse">
-            <a:avLst/>
-          </a:prstGeom>
-          <a:solidFill>
-            <a:srgbClr val="E36C1C">
-              <a:alpha val="34000"/>
-            </a:srgbClr>
-          </a:solidFill>
-          <a:ln>
-            <a:noFill/>
-          </a:ln>
-        </p:spPr>
-        <p:txBody>
-          <a:bodyPr rtlCol="0" anchor="ctr"/>
-          <a:lstStyle/>
-          <a:p>
-            <a:pPr algn="ctr"/>
-          </a:p>
-        </p:txBody>
-      </p:sp>
-      <p:sp>
-        <p:nvSpPr>
-          <p:cNvPr id="10" name="Oval 9"/>
-          <p:cNvSpPr/>
-          <p:nvPr/>
-        </p:nvSpPr>
-        <p:spPr>
-          <a:xfrm>
-            <a:off x="2678400" y="158400"/>
-            <a:ext cx="43200" cy="43200"/>
-          </a:xfrm>
-          <a:prstGeom prst="ellipse">
-            <a:avLst/>
-          </a:prstGeom>
-          <a:solidFill>
-            <a:srgbClr val="E36C1C">
-              <a:alpha val="70000"/>
-            </a:srgbClr>
-          </a:solidFill>
-          <a:ln>
-            <a:noFill/>
-          </a:ln>
-        </p:spPr>
-        <p:txBody>
-          <a:bodyPr rtlCol="0" anchor="ctr"/>
-          <a:lstStyle/>
-          <a:p>
-            <a:pPr algn="ctr"/>
-          </a:p>
-        </p:txBody>
-      </p:sp>
-      <p:sp>
-        <p:nvSpPr>
-          <p:cNvPr id="11" name="Oval 10"/>
-          <p:cNvSpPr/>
-          <p:nvPr/>
-        </p:nvSpPr>
-        <p:spPr>
-          <a:xfrm>
-            <a:off x="2678400" y="266400"/>
-            <a:ext cx="43200" cy="43200"/>
-          </a:xfrm>
-          <a:prstGeom prst="ellipse">
-            <a:avLst/>
-          </a:prstGeom>
-          <a:solidFill>
-            <a:srgbClr val="E36C1C">
-              <a:alpha val="57999"/>
-            </a:srgbClr>
-          </a:solidFill>
-          <a:ln>
-            <a:noFill/>
-          </a:ln>
-        </p:spPr>
-        <p:txBody>
-          <a:bodyPr rtlCol="0" anchor="ctr"/>
-          <a:lstStyle/>
-          <a:p>
-            <a:pPr algn="ctr"/>
-          </a:p>
-        </p:txBody>
-      </p:sp>
-      <p:sp>
-        <p:nvSpPr>
-          <p:cNvPr id="12" name="Oval 11"/>
-          <p:cNvSpPr/>
-          <p:nvPr/>
-        </p:nvSpPr>
-        <p:spPr>
-          <a:xfrm>
-            <a:off x="2678400" y="374400"/>
-            <a:ext cx="43200" cy="43200"/>
-          </a:xfrm>
-          <a:prstGeom prst="ellipse">
-            <a:avLst/>
-          </a:prstGeom>
-          <a:solidFill>
-            <a:srgbClr val="E36C1C">
-              <a:alpha val="46000"/>
-            </a:srgbClr>
-          </a:solidFill>
-          <a:ln>
-            <a:noFill/>
-          </a:ln>
-        </p:spPr>
-        <p:txBody>
-          <a:bodyPr rtlCol="0" anchor="ctr"/>
-          <a:lstStyle/>
-          <a:p>
-            <a:pPr algn="ctr"/>
-          </a:p>
-        </p:txBody>
-      </p:sp>
-      <p:sp>
-        <p:nvSpPr>
-          <p:cNvPr id="13" name="Oval 12"/>
-          <p:cNvSpPr/>
-          <p:nvPr/>
-        </p:nvSpPr>
-        <p:spPr>
-          <a:xfrm>
-            <a:off x="2678400" y="482400"/>
-            <a:ext cx="43200" cy="43200"/>
-          </a:xfrm>
-          <a:prstGeom prst="ellipse">
-            <a:avLst/>
-          </a:prstGeom>
-          <a:solidFill>
-            <a:srgbClr val="E36C1C">
-              <a:alpha val="34000"/>
-            </a:srgbClr>
-          </a:solidFill>
-          <a:ln>
-            <a:noFill/>
-          </a:ln>
-        </p:spPr>
-        <p:txBody>
-          <a:bodyPr rtlCol="0" anchor="ctr"/>
-          <a:lstStyle/>
-          <a:p>
-            <a:pPr algn="ctr"/>
-          </a:p>
-        </p:txBody>
-      </p:sp>
-      <p:sp>
-        <p:nvSpPr>
-          <p:cNvPr id="14" name="Oval 13"/>
-          <p:cNvSpPr/>
-          <p:nvPr/>
-        </p:nvSpPr>
-        <p:spPr>
-          <a:xfrm>
-            <a:off x="2786400" y="158400"/>
-            <a:ext cx="43200" cy="43200"/>
-          </a:xfrm>
-          <a:prstGeom prst="ellipse">
-            <a:avLst/>
-          </a:prstGeom>
-          <a:solidFill>
-            <a:srgbClr val="E36C1C">
-              <a:alpha val="70000"/>
-            </a:srgbClr>
-          </a:solidFill>
-          <a:ln>
-            <a:noFill/>
-          </a:ln>
-        </p:spPr>
-        <p:txBody>
-          <a:bodyPr rtlCol="0" anchor="ctr"/>
-          <a:lstStyle/>
-          <a:p>
-            <a:pPr algn="ctr"/>
-          </a:p>
-        </p:txBody>
-      </p:sp>
-      <p:sp>
-        <p:nvSpPr>
-          <p:cNvPr id="15" name="Oval 14"/>
-          <p:cNvSpPr/>
-          <p:nvPr/>
-        </p:nvSpPr>
-        <p:spPr>
-          <a:xfrm>
-            <a:off x="2786400" y="266400"/>
-            <a:ext cx="43200" cy="43200"/>
-          </a:xfrm>
-          <a:prstGeom prst="ellipse">
-            <a:avLst/>
-          </a:prstGeom>
-          <a:solidFill>
-            <a:srgbClr val="E36C1C">
-              <a:alpha val="57999"/>
-            </a:srgbClr>
-          </a:solidFill>
-          <a:ln>
-            <a:noFill/>
-          </a:ln>
-        </p:spPr>
-        <p:txBody>
-          <a:bodyPr rtlCol="0" anchor="ctr"/>
-          <a:lstStyle/>
-          <a:p>
-            <a:pPr algn="ctr"/>
-          </a:p>
-        </p:txBody>
-      </p:sp>
-      <p:sp>
-        <p:nvSpPr>
-          <p:cNvPr id="16" name="Oval 15"/>
-          <p:cNvSpPr/>
-          <p:nvPr/>
-        </p:nvSpPr>
-        <p:spPr>
-          <a:xfrm>
-            <a:off x="2786400" y="374400"/>
-            <a:ext cx="43200" cy="43200"/>
-          </a:xfrm>
-          <a:prstGeom prst="ellipse">
-            <a:avLst/>
-          </a:prstGeom>
-          <a:solidFill>
-            <a:srgbClr val="E36C1C">
-              <a:alpha val="46000"/>
-            </a:srgbClr>
-          </a:solidFill>
-          <a:ln>
-            <a:noFill/>
-          </a:ln>
-        </p:spPr>
-        <p:txBody>
-          <a:bodyPr rtlCol="0" anchor="ctr"/>
-          <a:lstStyle/>
-          <a:p>
-            <a:pPr algn="ctr"/>
-          </a:p>
-        </p:txBody>
-      </p:sp>
-      <p:sp>
-        <p:nvSpPr>
-          <p:cNvPr id="17" name="Oval 16"/>
-          <p:cNvSpPr/>
-          <p:nvPr/>
-        </p:nvSpPr>
-        <p:spPr>
-          <a:xfrm>
-            <a:off x="2786400" y="482400"/>
-            <a:ext cx="43200" cy="43200"/>
-          </a:xfrm>
-          <a:prstGeom prst="ellipse">
-            <a:avLst/>
-          </a:prstGeom>
-          <a:solidFill>
-            <a:srgbClr val="E36C1C">
-              <a:alpha val="34000"/>
-            </a:srgbClr>
-          </a:solidFill>
-          <a:ln>
-            <a:noFill/>
-          </a:ln>
-        </p:spPr>
-        <p:txBody>
-          <a:bodyPr rtlCol="0" anchor="ctr"/>
-          <a:lstStyle/>
-          <a:p>
-            <a:pPr algn="ctr"/>
-          </a:p>
-        </p:txBody>
-      </p:sp>
-      <p:sp>
-        <p:nvSpPr>
-          <p:cNvPr id="18" name="Oval 17"/>
-          <p:cNvSpPr/>
-          <p:nvPr/>
-        </p:nvSpPr>
-        <p:spPr>
-          <a:xfrm>
-            <a:off x="2894400" y="158400"/>
-            <a:ext cx="43200" cy="43200"/>
-          </a:xfrm>
-          <a:prstGeom prst="ellipse">
-            <a:avLst/>
-          </a:prstGeom>
-          <a:solidFill>
-            <a:srgbClr val="E36C1C">
-              <a:alpha val="70000"/>
-            </a:srgbClr>
-          </a:solidFill>
-          <a:ln>
-            <a:noFill/>
-          </a:ln>
-        </p:spPr>
-        <p:txBody>
-          <a:bodyPr rtlCol="0" anchor="ctr"/>
-          <a:lstStyle/>
-          <a:p>
-            <a:pPr algn="ctr"/>
-          </a:p>
-        </p:txBody>
-      </p:sp>
-      <p:sp>
-        <p:nvSpPr>
-          <p:cNvPr id="19" name="Oval 18"/>
-          <p:cNvSpPr/>
-          <p:nvPr/>
-        </p:nvSpPr>
-        <p:spPr>
-          <a:xfrm>
-            <a:off x="2894400" y="266400"/>
-            <a:ext cx="43200" cy="43200"/>
-          </a:xfrm>
-          <a:prstGeom prst="ellipse">
-            <a:avLst/>
-          </a:prstGeom>
-          <a:solidFill>
-            <a:srgbClr val="E36C1C">
-              <a:alpha val="57999"/>
-            </a:srgbClr>
-          </a:solidFill>
-          <a:ln>
-            <a:noFill/>
-          </a:ln>
-        </p:spPr>
-        <p:txBody>
-          <a:bodyPr rtlCol="0" anchor="ctr"/>
-          <a:lstStyle/>
-          <a:p>
-            <a:pPr algn="ctr"/>
-          </a:p>
-        </p:txBody>
-      </p:sp>
-      <p:sp>
-        <p:nvSpPr>
-          <p:cNvPr id="20" name="Oval 19"/>
-          <p:cNvSpPr/>
-          <p:nvPr/>
-        </p:nvSpPr>
-        <p:spPr>
-          <a:xfrm>
-            <a:off x="2894400" y="374400"/>
-            <a:ext cx="43200" cy="43200"/>
-          </a:xfrm>
-          <a:prstGeom prst="ellipse">
-            <a:avLst/>
-          </a:prstGeom>
-          <a:solidFill>
-            <a:srgbClr val="E36C1C">
-              <a:alpha val="46000"/>
-            </a:srgbClr>
-          </a:solidFill>
-          <a:ln>
-            <a:noFill/>
-          </a:ln>
-        </p:spPr>
-        <p:txBody>
-          <a:bodyPr rtlCol="0" anchor="ctr"/>
-          <a:lstStyle/>
-          <a:p>
-            <a:pPr algn="ctr"/>
-          </a:p>
-        </p:txBody>
-      </p:sp>
-      <p:sp>
-        <p:nvSpPr>
-          <p:cNvPr id="21" name="Oval 20"/>
-          <p:cNvSpPr/>
-          <p:nvPr/>
-        </p:nvSpPr>
-        <p:spPr>
-          <a:xfrm>
-            <a:off x="2894400" y="482400"/>
-            <a:ext cx="43200" cy="43200"/>
-          </a:xfrm>
-          <a:prstGeom prst="ellipse">
-            <a:avLst/>
-          </a:prstGeom>
-          <a:solidFill>
-            <a:srgbClr val="E36C1C">
-              <a:alpha val="34000"/>
-            </a:srgbClr>
-          </a:solidFill>
-          <a:ln>
-            <a:noFill/>
-          </a:ln>
-        </p:spPr>
-        <p:txBody>
-          <a:bodyPr rtlCol="0" anchor="ctr"/>
-          <a:lstStyle/>
-          <a:p>
-            <a:pPr algn="ctr"/>
-          </a:p>
-        </p:txBody>
-      </p:sp>
-      <p:sp>
-        <p:nvSpPr>
-          <p:cNvPr id="22" name="Rectangle 21"/>
-          <p:cNvSpPr/>
-          <p:nvPr/>
-        </p:nvSpPr>
-        <p:spPr>
-          <a:xfrm>
-            <a:off x="0" y="1663200"/>
-            <a:ext cx="3240000" cy="136800"/>
-          </a:xfrm>
-          <a:prstGeom prst="rect">
-            <a:avLst/>
-          </a:prstGeom>
-          <a:solidFill>
-            <a:srgbClr val="E36C1C"/>
-          </a:solidFill>
-          <a:ln>
-            <a:noFill/>
-          </a:ln>
-        </p:spPr>
-        <p:txBody>
-          <a:bodyPr rtlCol="0" anchor="ctr"/>
-          <a:lstStyle/>
-          <a:p>
-            <a:pPr algn="ctr"/>
-          </a:p>
-        </p:txBody>
-      </p:sp>
-      <p:sp>
-        <p:nvSpPr>
-          <p:cNvPr id="23" name="Rectangle 22"/>
-          <p:cNvSpPr/>
-          <p:nvPr/>
-        </p:nvSpPr>
-        <p:spPr>
-          <a:xfrm>
-            <a:off x="0" y="1663200"/>
-            <a:ext cx="936000" cy="136800"/>
-          </a:xfrm>
-          <a:prstGeom prst="rect">
-            <a:avLst/>
-          </a:prstGeom>
-          <a:solidFill>
-            <a:srgbClr val="FBE6D8"/>
-          </a:solidFill>
-          <a:ln>
-            <a:noFill/>
-          </a:ln>
-        </p:spPr>
-        <p:txBody>
-          <a:bodyPr rtlCol="0" anchor="ctr"/>
-          <a:lstStyle/>
-          <a:p>
-            <a:pPr algn="ctr"/>
-          </a:p>
-        </p:txBody>
-      </p:sp>
-      <p:sp>
-        <p:nvSpPr>
-          <p:cNvPr id="24" name="텍스트"/>
-          <p:cNvSpPr txBox="1"/>
-          <p:nvPr/>
-        </p:nvSpPr>
-        <p:spPr>
-          <a:xfrm>
-            <a:off x="252000" y="208800"/>
-            <a:ext cx="1800000" cy="100800"/>
+            <a:off x="252000" y="223200"/>
+            <a:ext cx="2016000" cy="133351"/>
           </a:xfrm>
           <a:prstGeom prst="rect">
             <a:avLst/>
@@ -3799,13 +3121,13 @@
           <a:p>
             <a:pPr algn="l">
               <a:lnSpc>
-                <a:spcPts val="1087"/>
+                <a:spcPts val="1015"/>
               </a:lnSpc>
             </a:pPr>
             <a:r>
-              <a:rPr sz="750" b="1" spc="150">
+              <a:rPr sz="700" b="1" spc="200">
                 <a:solidFill>
-                  <a:srgbClr val="8E664B"/>
+                  <a:srgbClr val="A3A9B5"/>
                 </a:solidFill>
                 <a:latin typeface="맑은 고딕"/>
                 <a:ea typeface="맑은 고딕"/>
@@ -3817,14 +3139,14 @@
       </p:sp>
       <p:sp>
         <p:nvSpPr>
-          <p:cNvPr id="25" name="텍스트"/>
+          <p:cNvPr id="3" name="텍스트"/>
           <p:cNvSpPr txBox="1"/>
           <p:nvPr/>
         </p:nvSpPr>
         <p:spPr>
           <a:xfrm>
-            <a:off x="252000" y="540000"/>
-            <a:ext cx="2016000" cy="313692"/>
+            <a:off x="252000" y="468000"/>
+            <a:ext cx="2520000" cy="360000"/>
           </a:xfrm>
           <a:prstGeom prst="rect">
             <a:avLst/>
@@ -3839,13 +3161,13 @@
           <a:p>
             <a:pPr algn="l">
               <a:lnSpc>
-                <a:spcPts val="2755"/>
+                <a:spcPts val="3190"/>
               </a:lnSpc>
             </a:pPr>
             <a:r>
-              <a:rPr sz="1900" b="1" spc="50">
+              <a:rPr sz="2200" b="1">
                 <a:solidFill>
-                  <a:srgbClr val="884111"/>
+                  <a:srgbClr val="FFFFFF"/>
                 </a:solidFill>
                 <a:latin typeface="맑은 고딕"/>
                 <a:ea typeface="맑은 고딕"/>
@@ -3857,14 +3179,14 @@
       </p:sp>
       <p:sp>
         <p:nvSpPr>
-          <p:cNvPr id="26" name="텍스트"/>
+          <p:cNvPr id="4" name="텍스트"/>
           <p:cNvSpPr txBox="1"/>
           <p:nvPr/>
         </p:nvSpPr>
         <p:spPr>
           <a:xfrm>
-            <a:off x="252000" y="828000"/>
-            <a:ext cx="2016000" cy="122400"/>
+            <a:off x="252000" y="871200"/>
+            <a:ext cx="2520000" cy="171451"/>
           </a:xfrm>
           <a:prstGeom prst="rect">
             <a:avLst/>
@@ -3879,13 +3201,13 @@
           <a:p>
             <a:pPr algn="l">
               <a:lnSpc>
-                <a:spcPts val="1232"/>
+                <a:spcPts val="1305"/>
               </a:lnSpc>
             </a:pPr>
             <a:r>
-              <a:rPr sz="850" b="1">
+              <a:rPr sz="900" b="0">
                 <a:solidFill>
-                  <a:srgbClr val="AA5115"/>
+                  <a:srgbClr val="A3A9B5"/>
                 </a:solidFill>
                 <a:latin typeface="맑은 고딕"/>
                 <a:ea typeface="맑은 고딕"/>
@@ -3897,14 +3219,14 @@
       </p:sp>
       <p:sp>
         <p:nvSpPr>
-          <p:cNvPr id="27" name="텍스트"/>
+          <p:cNvPr id="5" name="텍스트"/>
           <p:cNvSpPr txBox="1"/>
           <p:nvPr/>
         </p:nvSpPr>
         <p:spPr>
           <a:xfrm>
-            <a:off x="252000" y="1108800"/>
-            <a:ext cx="122400" cy="168911"/>
+            <a:off x="252000" y="1216800"/>
+            <a:ext cx="2520000" cy="129541"/>
           </a:xfrm>
           <a:prstGeom prst="rect">
             <a:avLst/>
@@ -3919,32 +3241,61 @@
           <a:p>
             <a:pPr algn="l">
               <a:lnSpc>
-                <a:spcPts val="1015"/>
+                <a:spcPts val="986"/>
               </a:lnSpc>
             </a:pPr>
             <a:r>
-              <a:rPr sz="700" b="1">
+              <a:rPr sz="680" b="0">
                 <a:solidFill>
-                  <a:srgbClr val="AA5115"/>
+                  <a:srgbClr val="A3A9B5"/>
                 </a:solidFill>
                 <a:latin typeface="맑은 고딕"/>
                 <a:ea typeface="맑은 고딕"/>
               </a:rPr>
-              <a:t>T</a:t>
-            </a:r>
-          </a:p>
-        </p:txBody>
-      </p:sp>
-      <p:sp>
-        <p:nvSpPr>
-          <p:cNvPr id="28" name="텍스트"/>
+              <a:t>주소를 입력해 주세요</a:t>
+            </a:r>
+          </a:p>
+        </p:txBody>
+      </p:sp>
+      <p:sp>
+        <p:nvSpPr>
+          <p:cNvPr id="6" name="Rectangle 5"/>
+          <p:cNvSpPr/>
+          <p:nvPr/>
+        </p:nvSpPr>
+        <p:spPr>
+          <a:xfrm>
+            <a:off x="0" y="1476000"/>
+            <a:ext cx="3240000" cy="324000"/>
+          </a:xfrm>
+          <a:prstGeom prst="rect">
+            <a:avLst/>
+          </a:prstGeom>
+          <a:solidFill>
+            <a:srgbClr val="818181"/>
+          </a:solidFill>
+          <a:ln>
+            <a:noFill/>
+          </a:ln>
+        </p:spPr>
+        <p:txBody>
+          <a:bodyPr rtlCol="0" anchor="ctr"/>
+          <a:lstStyle/>
+          <a:p>
+            <a:pPr algn="ctr"/>
+          </a:p>
+        </p:txBody>
+      </p:sp>
+      <p:sp>
+        <p:nvSpPr>
+          <p:cNvPr id="7" name="텍스트"/>
           <p:cNvSpPr txBox="1"/>
           <p:nvPr/>
         </p:nvSpPr>
         <p:spPr>
           <a:xfrm>
-            <a:off x="396000" y="1108800"/>
-            <a:ext cx="1584000" cy="168911"/>
+            <a:off x="252000" y="1569600"/>
+            <a:ext cx="1296000" cy="133351"/>
           </a:xfrm>
           <a:prstGeom prst="rect">
             <a:avLst/>
@@ -3963,9 +3314,9 @@
               </a:lnSpc>
             </a:pPr>
             <a:r>
-              <a:rPr sz="700" b="0">
+              <a:rPr sz="700" b="1">
                 <a:solidFill>
-                  <a:srgbClr val="884111"/>
+                  <a:srgbClr val="FFFFFF"/>
                 </a:solidFill>
                 <a:latin typeface="맑은 고딕"/>
                 <a:ea typeface="맑은 고딕"/>
@@ -3977,14 +3328,14 @@
       </p:sp>
       <p:sp>
         <p:nvSpPr>
-          <p:cNvPr id="29" name="텍스트"/>
+          <p:cNvPr id="8" name="텍스트"/>
           <p:cNvSpPr txBox="1"/>
           <p:nvPr/>
         </p:nvSpPr>
         <p:spPr>
           <a:xfrm>
-            <a:off x="252000" y="1277711"/>
-            <a:ext cx="122400" cy="168911"/>
+            <a:off x="1656000" y="1569600"/>
+            <a:ext cx="1368000" cy="133351"/>
           </a:xfrm>
           <a:prstGeom prst="rect">
             <a:avLst/>
@@ -4005,224 +3356,13 @@
             <a:r>
               <a:rPr sz="700" b="1">
                 <a:solidFill>
-                  <a:srgbClr val="AA5115"/>
-                </a:solidFill>
-                <a:latin typeface="맑은 고딕"/>
-                <a:ea typeface="맑은 고딕"/>
-              </a:rPr>
-              <a:t>E</a:t>
-            </a:r>
-          </a:p>
-        </p:txBody>
-      </p:sp>
-      <p:sp>
-        <p:nvSpPr>
-          <p:cNvPr id="30" name="텍스트"/>
-          <p:cNvSpPr txBox="1"/>
-          <p:nvPr/>
-        </p:nvSpPr>
-        <p:spPr>
-          <a:xfrm>
-            <a:off x="396000" y="1277711"/>
-            <a:ext cx="1584000" cy="168911"/>
-          </a:xfrm>
-          <a:prstGeom prst="rect">
-            <a:avLst/>
-          </a:prstGeom>
-          <a:noFill/>
-        </p:spPr>
-        <p:txBody>
-          <a:bodyPr wrap="square" lIns="0" rIns="0" tIns="0" bIns="0" anchor="t">
-            <a:spAutoFit/>
-          </a:bodyPr>
-          <a:lstStyle/>
-          <a:p>
-            <a:pPr algn="l">
-              <a:lnSpc>
-                <a:spcPts val="1015"/>
-              </a:lnSpc>
-            </a:pPr>
-            <a:r>
-              <a:rPr sz="700" b="0">
-                <a:solidFill>
-                  <a:srgbClr val="884111"/>
+                  <a:srgbClr val="FFFFFF"/>
                 </a:solidFill>
                 <a:latin typeface="맑은 고딕"/>
                 <a:ea typeface="맑은 고딕"/>
               </a:rPr>
               <a:t>name@example.com</a:t>
             </a:r>
-          </a:p>
-        </p:txBody>
-      </p:sp>
-      <p:sp>
-        <p:nvSpPr>
-          <p:cNvPr id="31" name="텍스트"/>
-          <p:cNvSpPr txBox="1"/>
-          <p:nvPr/>
-        </p:nvSpPr>
-        <p:spPr>
-          <a:xfrm>
-            <a:off x="252000" y="1446622"/>
-            <a:ext cx="122400" cy="168911"/>
-          </a:xfrm>
-          <a:prstGeom prst="rect">
-            <a:avLst/>
-          </a:prstGeom>
-          <a:noFill/>
-        </p:spPr>
-        <p:txBody>
-          <a:bodyPr wrap="square" lIns="0" rIns="0" tIns="0" bIns="0" anchor="t">
-            <a:spAutoFit/>
-          </a:bodyPr>
-          <a:lstStyle/>
-          <a:p>
-            <a:pPr algn="l">
-              <a:lnSpc>
-                <a:spcPts val="1015"/>
-              </a:lnSpc>
-            </a:pPr>
-            <a:r>
-              <a:rPr sz="700" b="1">
-                <a:solidFill>
-                  <a:srgbClr val="AA5115"/>
-                </a:solidFill>
-                <a:latin typeface="맑은 고딕"/>
-                <a:ea typeface="맑은 고딕"/>
-              </a:rPr>
-              <a:t>A</a:t>
-            </a:r>
-          </a:p>
-        </p:txBody>
-      </p:sp>
-      <p:sp>
-        <p:nvSpPr>
-          <p:cNvPr id="32" name="텍스트"/>
-          <p:cNvSpPr txBox="1"/>
-          <p:nvPr/>
-        </p:nvSpPr>
-        <p:spPr>
-          <a:xfrm>
-            <a:off x="396000" y="1446622"/>
-            <a:ext cx="1584000" cy="168911"/>
-          </a:xfrm>
-          <a:prstGeom prst="rect">
-            <a:avLst/>
-          </a:prstGeom>
-          <a:noFill/>
-        </p:spPr>
-        <p:txBody>
-          <a:bodyPr wrap="square" lIns="0" rIns="0" tIns="0" bIns="0" anchor="t">
-            <a:spAutoFit/>
-          </a:bodyPr>
-          <a:lstStyle/>
-          <a:p>
-            <a:pPr algn="l">
-              <a:lnSpc>
-                <a:spcPts val="1015"/>
-              </a:lnSpc>
-            </a:pPr>
-            <a:r>
-              <a:rPr sz="700" b="0">
-                <a:solidFill>
-                  <a:srgbClr val="884111"/>
-                </a:solidFill>
-                <a:latin typeface="맑은 고딕"/>
-                <a:ea typeface="맑은 고딕"/>
-              </a:rPr>
-              <a:t>주소를 입력해 주세요</a:t>
-            </a:r>
-          </a:p>
-        </p:txBody>
-      </p:sp>
-      <p:sp>
-        <p:nvSpPr>
-          <p:cNvPr id="33" name="Oval 32"/>
-          <p:cNvSpPr/>
-          <p:nvPr/>
-        </p:nvSpPr>
-        <p:spPr>
-          <a:xfrm>
-            <a:off x="2802240" y="1069920"/>
-            <a:ext cx="155520" cy="155520"/>
-          </a:xfrm>
-          <a:prstGeom prst="ellipse">
-            <a:avLst/>
-          </a:prstGeom>
-          <a:solidFill>
-            <a:srgbClr val="E36C1C"/>
-          </a:solidFill>
-          <a:ln>
-            <a:noFill/>
-          </a:ln>
-        </p:spPr>
-        <p:txBody>
-          <a:bodyPr rtlCol="0" anchor="ctr"/>
-          <a:lstStyle/>
-          <a:p>
-            <a:pPr algn="ctr"/>
-          </a:p>
-        </p:txBody>
-      </p:sp>
-      <p:sp>
-        <p:nvSpPr>
-          <p:cNvPr id="34" name="Rounded Rectangle 33"/>
-          <p:cNvSpPr/>
-          <p:nvPr/>
-        </p:nvSpPr>
-        <p:spPr>
-          <a:xfrm>
-            <a:off x="2842560" y="1222560"/>
-            <a:ext cx="74880" cy="46080"/>
-          </a:xfrm>
-          <a:prstGeom prst="roundRect">
-            <a:avLst>
-              <a:gd name="adj" fmla="val 18750"/>
-            </a:avLst>
-          </a:prstGeom>
-          <a:solidFill>
-            <a:srgbClr val="FBE6D8"/>
-          </a:solidFill>
-          <a:ln>
-            <a:noFill/>
-          </a:ln>
-        </p:spPr>
-        <p:txBody>
-          <a:bodyPr rtlCol="0" anchor="ctr"/>
-          <a:lstStyle/>
-          <a:p>
-            <a:pPr algn="ctr"/>
-          </a:p>
-        </p:txBody>
-      </p:sp>
-      <p:sp>
-        <p:nvSpPr>
-          <p:cNvPr id="35" name="Rounded Rectangle 34"/>
-          <p:cNvSpPr/>
-          <p:nvPr/>
-        </p:nvSpPr>
-        <p:spPr>
-          <a:xfrm>
-            <a:off x="2854080" y="1277280"/>
-            <a:ext cx="51840" cy="25920"/>
-          </a:xfrm>
-          <a:prstGeom prst="roundRect">
-            <a:avLst>
-              <a:gd name="adj" fmla="val 33333"/>
-            </a:avLst>
-          </a:prstGeom>
-          <a:solidFill>
-            <a:srgbClr val="FBE6D8"/>
-          </a:solidFill>
-          <a:ln>
-            <a:noFill/>
-          </a:ln>
-        </p:spPr>
-        <p:txBody>
-          <a:bodyPr rtlCol="0" anchor="ctr"/>
-          <a:lstStyle/>
-          <a:p>
-            <a:pPr algn="ctr"/>
           </a:p>
         </p:txBody>
       </p:sp>
@@ -4240,7 +3380,7 @@
     <p:bg>
       <p:bgPr>
         <a:solidFill>
-          <a:srgbClr val="FDF3ED"/>
+          <a:srgbClr val="FFFFFF"/>
         </a:solidFill>
         <a:effectLst/>
       </p:bgPr>
@@ -4260,14 +3400,14 @@
         </p:nvSpPr>
         <p:spPr>
           <a:xfrm>
-            <a:off x="1192320" y="250560"/>
-            <a:ext cx="855360" cy="855360"/>
+            <a:off x="1591200" y="511200"/>
+            <a:ext cx="57600" cy="57600"/>
           </a:xfrm>
           <a:prstGeom prst="ellipse">
             <a:avLst/>
           </a:prstGeom>
           <a:solidFill>
-            <a:srgbClr val="E36C1C"/>
+            <a:srgbClr val="111111"/>
           </a:solidFill>
           <a:ln>
             <a:noFill/>
@@ -4283,107 +3423,14 @@
       </p:sp>
       <p:sp>
         <p:nvSpPr>
-          <p:cNvPr id="3" name="Rounded Rectangle 2"/>
-          <p:cNvSpPr/>
+          <p:cNvPr id="3" name="텍스트"/>
+          <p:cNvSpPr txBox="1"/>
           <p:nvPr/>
         </p:nvSpPr>
         <p:spPr>
           <a:xfrm>
-            <a:off x="1414080" y="1090080"/>
-            <a:ext cx="411840" cy="253440"/>
-          </a:xfrm>
-          <a:prstGeom prst="roundRect">
-            <a:avLst>
-              <a:gd name="adj" fmla="val 18750"/>
-            </a:avLst>
-          </a:prstGeom>
-          <a:solidFill>
-            <a:srgbClr val="FBE6D8"/>
-          </a:solidFill>
-          <a:ln>
-            <a:noFill/>
-          </a:ln>
-        </p:spPr>
-        <p:txBody>
-          <a:bodyPr rtlCol="0" anchor="ctr"/>
-          <a:lstStyle/>
-          <a:p>
-            <a:pPr algn="ctr"/>
-          </a:p>
-        </p:txBody>
-      </p:sp>
-      <p:sp>
-        <p:nvSpPr>
-          <p:cNvPr id="4" name="Rounded Rectangle 3"/>
-          <p:cNvSpPr/>
-          <p:nvPr/>
-        </p:nvSpPr>
-        <p:spPr>
-          <a:xfrm>
-            <a:off x="1477440" y="1391040"/>
-            <a:ext cx="285120" cy="142560"/>
-          </a:xfrm>
-          <a:prstGeom prst="roundRect">
-            <a:avLst>
-              <a:gd name="adj" fmla="val 33333"/>
-            </a:avLst>
-          </a:prstGeom>
-          <a:solidFill>
-            <a:srgbClr val="FBE6D8"/>
-          </a:solidFill>
-          <a:ln>
-            <a:noFill/>
-          </a:ln>
-        </p:spPr>
-        <p:txBody>
-          <a:bodyPr rtlCol="0" anchor="ctr"/>
-          <a:lstStyle/>
-          <a:p>
-            <a:pPr algn="ctr"/>
-          </a:p>
-        </p:txBody>
-      </p:sp>
-      <p:sp>
-        <p:nvSpPr>
-          <p:cNvPr id="5" name="Rectangle 4"/>
-          <p:cNvSpPr/>
-          <p:nvPr/>
-        </p:nvSpPr>
-        <p:spPr>
-          <a:xfrm>
-            <a:off x="0" y="0"/>
-            <a:ext cx="3240000" cy="1800000"/>
-          </a:xfrm>
-          <a:prstGeom prst="rect">
-            <a:avLst/>
-          </a:prstGeom>
-          <a:solidFill>
-            <a:srgbClr val="FDF3ED">
-              <a:alpha val="90000"/>
-            </a:srgbClr>
-          </a:solidFill>
-          <a:ln>
-            <a:noFill/>
-          </a:ln>
-        </p:spPr>
-        <p:txBody>
-          <a:bodyPr rtlCol="0" anchor="ctr"/>
-          <a:lstStyle/>
-          <a:p>
-            <a:pPr algn="ctr"/>
-          </a:p>
-        </p:txBody>
-      </p:sp>
-      <p:sp>
-        <p:nvSpPr>
-          <p:cNvPr id="6" name="텍스트"/>
-          <p:cNvSpPr txBox="1"/>
-          <p:nvPr/>
-        </p:nvSpPr>
-        <p:spPr>
-          <a:xfrm>
-            <a:off x="396000" y="612000"/>
-            <a:ext cx="2448000" cy="432000"/>
+            <a:off x="396000" y="684000"/>
+            <a:ext cx="2448000" cy="504000"/>
           </a:xfrm>
           <a:prstGeom prst="rect">
             <a:avLst/>
@@ -4391,7 +3438,7 @@
           <a:noFill/>
         </p:spPr>
         <p:txBody>
-          <a:bodyPr wrap="square" lIns="0" rIns="0" tIns="0" bIns="0" anchor="ctr">
+          <a:bodyPr wrap="square" lIns="0" rIns="0" tIns="0" bIns="0" anchor="t">
             <a:spAutoFit/>
           </a:bodyPr>
           <a:lstStyle/>
@@ -4404,10 +3451,10 @@
             <a:r>
               <a:rPr sz="1200" b="1">
                 <a:solidFill>
-                  <a:srgbClr val="884111"/>
+                  <a:srgbClr val="12151C"/>
                 </a:solidFill>
-                <a:latin typeface="바탕"/>
-                <a:ea typeface="바탕"/>
+                <a:latin typeface="맑은 고딕"/>
+                <a:ea typeface="맑은 고딕"/>
               </a:rPr>
               <a:t>작업실의 불빛은 꺼지지 않습니다</a:t>
             </a:r>
@@ -4416,43 +3463,14 @@
       </p:sp>
       <p:sp>
         <p:nvSpPr>
-          <p:cNvPr id="7" name="Rectangle 6"/>
-          <p:cNvSpPr/>
+          <p:cNvPr id="4" name="텍스트"/>
+          <p:cNvSpPr txBox="1"/>
           <p:nvPr/>
         </p:nvSpPr>
         <p:spPr>
           <a:xfrm>
-            <a:off x="1512000" y="1173600"/>
-            <a:ext cx="216000" cy="10800"/>
-          </a:xfrm>
-          <a:prstGeom prst="rect">
-            <a:avLst/>
-          </a:prstGeom>
-          <a:solidFill>
-            <a:srgbClr val="E36C1C"/>
-          </a:solidFill>
-          <a:ln>
-            <a:noFill/>
-          </a:ln>
-        </p:spPr>
-        <p:txBody>
-          <a:bodyPr rtlCol="0" anchor="ctr"/>
-          <a:lstStyle/>
-          <a:p>
-            <a:pPr algn="ctr"/>
-          </a:p>
-        </p:txBody>
-      </p:sp>
-      <p:sp>
-        <p:nvSpPr>
-          <p:cNvPr id="8" name="텍스트"/>
-          <p:cNvSpPr txBox="1"/>
-          <p:nvPr/>
-        </p:nvSpPr>
-        <p:spPr>
-          <a:xfrm>
-            <a:off x="360000" y="1288800"/>
-            <a:ext cx="2520000" cy="108000"/>
+            <a:off x="360000" y="1339200"/>
+            <a:ext cx="2520000" cy="123826"/>
           </a:xfrm>
           <a:prstGeom prst="rect">
             <a:avLst/>
@@ -4467,13 +3485,13 @@
           <a:p>
             <a:pPr algn="ctr">
               <a:lnSpc>
-                <a:spcPts val="1087"/>
+                <a:spcPts val="942"/>
               </a:lnSpc>
             </a:pPr>
             <a:r>
-              <a:rPr sz="750" b="1" spc="300">
+              <a:rPr sz="650" b="1" spc="300">
                 <a:solidFill>
-                  <a:srgbClr val="8E664B"/>
+                  <a:srgbClr val="6B7280"/>
                 </a:solidFill>
                 <a:latin typeface="맑은 고딕"/>
                 <a:ea typeface="맑은 고딕"/>

--- a/public/fun/cards/creative/creative-30.pptx
+++ b/public/fun/cards/creative/creative-30.pptx
@@ -3105,8 +3105,8 @@
         </p:nvSpPr>
         <p:spPr>
           <a:xfrm>
-            <a:off x="252000" y="223200"/>
-            <a:ext cx="2016000" cy="133351"/>
+            <a:off x="252000" y="252000"/>
+            <a:ext cx="1512000" cy="123826"/>
           </a:xfrm>
           <a:prstGeom prst="rect">
             <a:avLst/>
@@ -3121,11 +3121,11 @@
           <a:p>
             <a:pPr algn="l">
               <a:lnSpc>
-                <a:spcPts val="1015"/>
+                <a:spcPts val="942"/>
               </a:lnSpc>
             </a:pPr>
             <a:r>
-              <a:rPr sz="700" b="1" spc="200">
+              <a:rPr sz="650" b="1" spc="220">
                 <a:solidFill>
                   <a:srgbClr val="A3A9B5"/>
                 </a:solidFill>
@@ -3137,16 +3137,37 @@
           </a:p>
         </p:txBody>
       </p:sp>
-      <p:sp>
-        <p:nvSpPr>
-          <p:cNvPr id="3" name="텍스트"/>
+      <p:cxnSp>
+        <p:nvCxnSpPr>
+          <p:cNvPr id="3" name="Connector 2"/>
+          <p:cNvCxnSpPr/>
+          <p:nvPr/>
+        </p:nvCxnSpPr>
+        <p:spPr>
+          <a:xfrm>
+            <a:off x="252000" y="388800"/>
+            <a:ext cx="2736000" cy="0"/>
+          </a:xfrm>
+          <a:prstGeom prst="line">
+            <a:avLst/>
+          </a:prstGeom>
+          <a:ln w="3600">
+            <a:solidFill>
+              <a:srgbClr val="2A2F38"/>
+            </a:solidFill>
+          </a:ln>
+        </p:spPr>
+      </p:cxnSp>
+      <p:sp>
+        <p:nvSpPr>
+          <p:cNvPr id="4" name="텍스트"/>
           <p:cNvSpPr txBox="1"/>
           <p:nvPr/>
         </p:nvSpPr>
         <p:spPr>
           <a:xfrm>
-            <a:off x="252000" y="468000"/>
-            <a:ext cx="2520000" cy="360000"/>
+            <a:off x="252000" y="576000"/>
+            <a:ext cx="1800000" cy="237600"/>
           </a:xfrm>
           <a:prstGeom prst="rect">
             <a:avLst/>
@@ -3161,11 +3182,11 @@
           <a:p>
             <a:pPr algn="l">
               <a:lnSpc>
-                <a:spcPts val="3190"/>
+                <a:spcPts val="1957"/>
               </a:lnSpc>
             </a:pPr>
             <a:r>
-              <a:rPr sz="2200" b="1">
+              <a:rPr sz="1350" b="1" spc="120">
                 <a:solidFill>
                   <a:srgbClr val="FFFFFF"/>
                 </a:solidFill>
@@ -3179,14 +3200,14 @@
       </p:sp>
       <p:sp>
         <p:nvSpPr>
-          <p:cNvPr id="4" name="텍스트"/>
+          <p:cNvPr id="5" name="텍스트"/>
           <p:cNvSpPr txBox="1"/>
           <p:nvPr/>
         </p:nvSpPr>
         <p:spPr>
           <a:xfrm>
-            <a:off x="252000" y="871200"/>
-            <a:ext cx="2520000" cy="171451"/>
+            <a:off x="252000" y="828000"/>
+            <a:ext cx="1800000" cy="133351"/>
           </a:xfrm>
           <a:prstGeom prst="rect">
             <a:avLst/>
@@ -3201,11 +3222,11 @@
           <a:p>
             <a:pPr algn="l">
               <a:lnSpc>
-                <a:spcPts val="1305"/>
+                <a:spcPts val="1015"/>
               </a:lnSpc>
             </a:pPr>
             <a:r>
-              <a:rPr sz="900" b="0">
+              <a:rPr sz="700" b="0" spc="60">
                 <a:solidFill>
                   <a:srgbClr val="A3A9B5"/>
                 </a:solidFill>
@@ -3219,14 +3240,14 @@
       </p:sp>
       <p:sp>
         <p:nvSpPr>
-          <p:cNvPr id="5" name="텍스트"/>
+          <p:cNvPr id="6" name="텍스트"/>
           <p:cNvSpPr txBox="1"/>
           <p:nvPr/>
         </p:nvSpPr>
         <p:spPr>
           <a:xfrm>
-            <a:off x="252000" y="1216800"/>
-            <a:ext cx="2520000" cy="129541"/>
+            <a:off x="252000" y="1036800"/>
+            <a:ext cx="2520000" cy="123826"/>
           </a:xfrm>
           <a:prstGeom prst="rect">
             <a:avLst/>
@@ -3241,11 +3262,11 @@
           <a:p>
             <a:pPr algn="l">
               <a:lnSpc>
-                <a:spcPts val="986"/>
+                <a:spcPts val="942"/>
               </a:lnSpc>
             </a:pPr>
             <a:r>
-              <a:rPr sz="680" b="0">
+              <a:rPr sz="650" b="0">
                 <a:solidFill>
                   <a:srgbClr val="A3A9B5"/>
                 </a:solidFill>
@@ -3259,14 +3280,14 @@
       </p:sp>
       <p:sp>
         <p:nvSpPr>
-          <p:cNvPr id="6" name="Rectangle 5"/>
+          <p:cNvPr id="7" name="Rectangle 6"/>
           <p:cNvSpPr/>
           <p:nvPr/>
         </p:nvSpPr>
         <p:spPr>
           <a:xfrm>
-            <a:off x="0" y="1476000"/>
-            <a:ext cx="3240000" cy="324000"/>
+            <a:off x="0" y="1339200"/>
+            <a:ext cx="3240000" cy="460800"/>
           </a:xfrm>
           <a:prstGeom prst="rect">
             <a:avLst/>
@@ -3288,14 +3309,14 @@
       </p:sp>
       <p:sp>
         <p:nvSpPr>
-          <p:cNvPr id="7" name="텍스트"/>
+          <p:cNvPr id="8" name="텍스트"/>
           <p:cNvSpPr txBox="1"/>
           <p:nvPr/>
         </p:nvSpPr>
         <p:spPr>
           <a:xfrm>
-            <a:off x="252000" y="1569600"/>
-            <a:ext cx="1296000" cy="133351"/>
+            <a:off x="252000" y="1476000"/>
+            <a:ext cx="936000" cy="91441"/>
           </a:xfrm>
           <a:prstGeom prst="rect">
             <a:avLst/>
@@ -3310,11 +3331,53 @@
           <a:p>
             <a:pPr algn="l">
               <a:lnSpc>
-                <a:spcPts val="1015"/>
+                <a:spcPts val="696"/>
               </a:lnSpc>
             </a:pPr>
             <a:r>
-              <a:rPr sz="700" b="1">
+              <a:rPr sz="480" b="1" spc="140">
+                <a:solidFill>
+                  <a:srgbClr val="FFFFFF">
+                    <a:alpha val="70000"/>
+                  </a:srgbClr>
+                </a:solidFill>
+                <a:latin typeface="맑은 고딕"/>
+                <a:ea typeface="맑은 고딕"/>
+              </a:rPr>
+              <a:t>TEL</a:t>
+            </a:r>
+          </a:p>
+        </p:txBody>
+      </p:sp>
+      <p:sp>
+        <p:nvSpPr>
+          <p:cNvPr id="9" name="텍스트"/>
+          <p:cNvSpPr txBox="1"/>
+          <p:nvPr/>
+        </p:nvSpPr>
+        <p:spPr>
+          <a:xfrm>
+            <a:off x="252000" y="1576800"/>
+            <a:ext cx="936000" cy="123826"/>
+          </a:xfrm>
+          <a:prstGeom prst="rect">
+            <a:avLst/>
+          </a:prstGeom>
+          <a:noFill/>
+        </p:spPr>
+        <p:txBody>
+          <a:bodyPr wrap="square" lIns="0" rIns="0" tIns="0" bIns="0" anchor="t">
+            <a:spAutoFit/>
+          </a:bodyPr>
+          <a:lstStyle/>
+          <a:p>
+            <a:pPr algn="l">
+              <a:lnSpc>
+                <a:spcPts val="942"/>
+              </a:lnSpc>
+            </a:pPr>
+            <a:r>
+              <a:rPr sz="650" b="1">
                 <a:solidFill>
                   <a:srgbClr val="FFFFFF"/>
                 </a:solidFill>
@@ -3328,14 +3391,14 @@
       </p:sp>
       <p:sp>
         <p:nvSpPr>
-          <p:cNvPr id="8" name="텍스트"/>
+          <p:cNvPr id="10" name="텍스트"/>
           <p:cNvSpPr txBox="1"/>
           <p:nvPr/>
         </p:nvSpPr>
         <p:spPr>
           <a:xfrm>
-            <a:off x="1656000" y="1569600"/>
-            <a:ext cx="1368000" cy="133351"/>
+            <a:off x="1188000" y="1476000"/>
+            <a:ext cx="1080000" cy="91441"/>
           </a:xfrm>
           <a:prstGeom prst="rect">
             <a:avLst/>
@@ -3350,11 +3413,53 @@
           <a:p>
             <a:pPr algn="l">
               <a:lnSpc>
-                <a:spcPts val="1015"/>
+                <a:spcPts val="696"/>
               </a:lnSpc>
             </a:pPr>
             <a:r>
-              <a:rPr sz="700" b="1">
+              <a:rPr sz="480" b="1" spc="140">
+                <a:solidFill>
+                  <a:srgbClr val="FFFFFF">
+                    <a:alpha val="70000"/>
+                  </a:srgbClr>
+                </a:solidFill>
+                <a:latin typeface="맑은 고딕"/>
+                <a:ea typeface="맑은 고딕"/>
+              </a:rPr>
+              <a:t>MAIL</a:t>
+            </a:r>
+          </a:p>
+        </p:txBody>
+      </p:sp>
+      <p:sp>
+        <p:nvSpPr>
+          <p:cNvPr id="11" name="텍스트"/>
+          <p:cNvSpPr txBox="1"/>
+          <p:nvPr/>
+        </p:nvSpPr>
+        <p:spPr>
+          <a:xfrm>
+            <a:off x="1188000" y="1576800"/>
+            <a:ext cx="1080000" cy="123826"/>
+          </a:xfrm>
+          <a:prstGeom prst="rect">
+            <a:avLst/>
+          </a:prstGeom>
+          <a:noFill/>
+        </p:spPr>
+        <p:txBody>
+          <a:bodyPr wrap="square" lIns="0" rIns="0" tIns="0" bIns="0" anchor="t">
+            <a:spAutoFit/>
+          </a:bodyPr>
+          <a:lstStyle/>
+          <a:p>
+            <a:pPr algn="l">
+              <a:lnSpc>
+                <a:spcPts val="942"/>
+              </a:lnSpc>
+            </a:pPr>
+            <a:r>
+              <a:rPr sz="650" b="1">
                 <a:solidFill>
                   <a:srgbClr val="FFFFFF"/>
                 </a:solidFill>
@@ -3366,6 +3471,27 @@
           </a:p>
         </p:txBody>
       </p:sp>
+      <p:cxnSp>
+        <p:nvCxnSpPr>
+          <p:cNvPr id="12" name="Connector 11"/>
+          <p:cNvCxnSpPr/>
+          <p:nvPr/>
+        </p:nvCxnSpPr>
+        <p:spPr>
+          <a:xfrm>
+            <a:off x="1108800" y="1468800"/>
+            <a:ext cx="0" cy="208800"/>
+          </a:xfrm>
+          <a:prstGeom prst="line">
+            <a:avLst/>
+          </a:prstGeom>
+          <a:ln w="3600">
+            <a:solidFill>
+              <a:srgbClr val="FFFFFF"/>
+            </a:solidFill>
+          </a:ln>
+        </p:spPr>
+      </p:cxnSp>
     </p:spTree>
   </p:cSld>
   <p:clrMapOvr>
@@ -3392,18 +3518,226 @@
         <p:nvPr/>
       </p:nvGrpSpPr>
       <p:grpSpPr/>
-      <p:sp>
-        <p:nvSpPr>
-          <p:cNvPr id="2" name="Oval 1"/>
+      <p:cxnSp>
+        <p:nvCxnSpPr>
+          <p:cNvPr id="2" name="Connector 1"/>
+          <p:cNvCxnSpPr/>
+          <p:nvPr/>
+        </p:nvCxnSpPr>
+        <p:spPr>
+          <a:xfrm>
+            <a:off x="93600" y="122400"/>
+            <a:ext cx="57600" cy="0"/>
+          </a:xfrm>
+          <a:prstGeom prst="line">
+            <a:avLst/>
+          </a:prstGeom>
+          <a:ln w="3600">
+            <a:solidFill>
+              <a:srgbClr val="E3E5E9"/>
+            </a:solidFill>
+          </a:ln>
+        </p:spPr>
+      </p:cxnSp>
+      <p:cxnSp>
+        <p:nvCxnSpPr>
+          <p:cNvPr id="3" name="Connector 2"/>
+          <p:cNvCxnSpPr/>
+          <p:nvPr/>
+        </p:nvCxnSpPr>
+        <p:spPr>
+          <a:xfrm>
+            <a:off x="122400" y="93600"/>
+            <a:ext cx="0" cy="57600"/>
+          </a:xfrm>
+          <a:prstGeom prst="line">
+            <a:avLst/>
+          </a:prstGeom>
+          <a:ln w="3600">
+            <a:solidFill>
+              <a:srgbClr val="E3E5E9"/>
+            </a:solidFill>
+          </a:ln>
+        </p:spPr>
+      </p:cxnSp>
+      <p:cxnSp>
+        <p:nvCxnSpPr>
+          <p:cNvPr id="4" name="Connector 3"/>
+          <p:cNvCxnSpPr/>
+          <p:nvPr/>
+        </p:nvCxnSpPr>
+        <p:spPr>
+          <a:xfrm>
+            <a:off x="3088800" y="122400"/>
+            <a:ext cx="57600" cy="0"/>
+          </a:xfrm>
+          <a:prstGeom prst="line">
+            <a:avLst/>
+          </a:prstGeom>
+          <a:ln w="3600">
+            <a:solidFill>
+              <a:srgbClr val="E3E5E9"/>
+            </a:solidFill>
+          </a:ln>
+        </p:spPr>
+      </p:cxnSp>
+      <p:cxnSp>
+        <p:nvCxnSpPr>
+          <p:cNvPr id="5" name="Connector 4"/>
+          <p:cNvCxnSpPr/>
+          <p:nvPr/>
+        </p:nvCxnSpPr>
+        <p:spPr>
+          <a:xfrm>
+            <a:off x="3117600" y="93600"/>
+            <a:ext cx="0" cy="57600"/>
+          </a:xfrm>
+          <a:prstGeom prst="line">
+            <a:avLst/>
+          </a:prstGeom>
+          <a:ln w="3600">
+            <a:solidFill>
+              <a:srgbClr val="E3E5E9"/>
+            </a:solidFill>
+          </a:ln>
+        </p:spPr>
+      </p:cxnSp>
+      <p:cxnSp>
+        <p:nvCxnSpPr>
+          <p:cNvPr id="6" name="Connector 5"/>
+          <p:cNvCxnSpPr/>
+          <p:nvPr/>
+        </p:nvCxnSpPr>
+        <p:spPr>
+          <a:xfrm>
+            <a:off x="93600" y="1677600"/>
+            <a:ext cx="57600" cy="0"/>
+          </a:xfrm>
+          <a:prstGeom prst="line">
+            <a:avLst/>
+          </a:prstGeom>
+          <a:ln w="3600">
+            <a:solidFill>
+              <a:srgbClr val="E3E5E9"/>
+            </a:solidFill>
+          </a:ln>
+        </p:spPr>
+      </p:cxnSp>
+      <p:cxnSp>
+        <p:nvCxnSpPr>
+          <p:cNvPr id="7" name="Connector 6"/>
+          <p:cNvCxnSpPr/>
+          <p:nvPr/>
+        </p:nvCxnSpPr>
+        <p:spPr>
+          <a:xfrm>
+            <a:off x="122400" y="1648800"/>
+            <a:ext cx="0" cy="57600"/>
+          </a:xfrm>
+          <a:prstGeom prst="line">
+            <a:avLst/>
+          </a:prstGeom>
+          <a:ln w="3600">
+            <a:solidFill>
+              <a:srgbClr val="E3E5E9"/>
+            </a:solidFill>
+          </a:ln>
+        </p:spPr>
+      </p:cxnSp>
+      <p:cxnSp>
+        <p:nvCxnSpPr>
+          <p:cNvPr id="8" name="Connector 7"/>
+          <p:cNvCxnSpPr/>
+          <p:nvPr/>
+        </p:nvCxnSpPr>
+        <p:spPr>
+          <a:xfrm>
+            <a:off x="3088800" y="1677600"/>
+            <a:ext cx="57600" cy="0"/>
+          </a:xfrm>
+          <a:prstGeom prst="line">
+            <a:avLst/>
+          </a:prstGeom>
+          <a:ln w="3600">
+            <a:solidFill>
+              <a:srgbClr val="E3E5E9"/>
+            </a:solidFill>
+          </a:ln>
+        </p:spPr>
+      </p:cxnSp>
+      <p:cxnSp>
+        <p:nvCxnSpPr>
+          <p:cNvPr id="9" name="Connector 8"/>
+          <p:cNvCxnSpPr/>
+          <p:nvPr/>
+        </p:nvCxnSpPr>
+        <p:spPr>
+          <a:xfrm>
+            <a:off x="3117600" y="1648800"/>
+            <a:ext cx="0" cy="57600"/>
+          </a:xfrm>
+          <a:prstGeom prst="line">
+            <a:avLst/>
+          </a:prstGeom>
+          <a:ln w="3600">
+            <a:solidFill>
+              <a:srgbClr val="E3E5E9"/>
+            </a:solidFill>
+          </a:ln>
+        </p:spPr>
+      </p:cxnSp>
+      <p:sp>
+        <p:nvSpPr>
+          <p:cNvPr id="10" name="텍스트"/>
+          <p:cNvSpPr txBox="1"/>
+          <p:nvPr/>
+        </p:nvSpPr>
+        <p:spPr>
+          <a:xfrm>
+            <a:off x="360000" y="331200"/>
+            <a:ext cx="2520000" cy="99061"/>
+          </a:xfrm>
+          <a:prstGeom prst="rect">
+            <a:avLst/>
+          </a:prstGeom>
+          <a:noFill/>
+        </p:spPr>
+        <p:txBody>
+          <a:bodyPr wrap="square" lIns="0" rIns="0" tIns="0" bIns="0" anchor="t">
+            <a:spAutoFit/>
+          </a:bodyPr>
+          <a:lstStyle/>
+          <a:p>
+            <a:pPr algn="ctr">
+              <a:lnSpc>
+                <a:spcPts val="754"/>
+              </a:lnSpc>
+            </a:pPr>
+            <a:r>
+              <a:rPr sz="520" b="1" spc="240">
+                <a:solidFill>
+                  <a:srgbClr val="6B7280"/>
+                </a:solidFill>
+                <a:latin typeface="맑은 고딕"/>
+                <a:ea typeface="맑은 고딕"/>
+              </a:rPr>
+              <a:t>작업 분야</a:t>
+            </a:r>
+          </a:p>
+        </p:txBody>
+      </p:sp>
+      <p:sp>
+        <p:nvSpPr>
+          <p:cNvPr id="11" name="Rectangle 10"/>
           <p:cNvSpPr/>
           <p:nvPr/>
         </p:nvSpPr>
         <p:spPr>
           <a:xfrm>
-            <a:off x="1591200" y="511200"/>
-            <a:ext cx="57600" cy="57600"/>
-          </a:xfrm>
-          <a:prstGeom prst="ellipse">
+            <a:off x="1530000" y="453600"/>
+            <a:ext cx="180000" cy="14400"/>
+          </a:xfrm>
+          <a:prstGeom prst="rect">
             <a:avLst/>
           </a:prstGeom>
           <a:solidFill>
@@ -3423,14 +3757,14 @@
       </p:sp>
       <p:sp>
         <p:nvSpPr>
-          <p:cNvPr id="3" name="텍스트"/>
+          <p:cNvPr id="12" name="텍스트"/>
           <p:cNvSpPr txBox="1"/>
           <p:nvPr/>
         </p:nvSpPr>
         <p:spPr>
           <a:xfrm>
-            <a:off x="396000" y="684000"/>
-            <a:ext cx="2448000" cy="504000"/>
+            <a:off x="360000" y="684000"/>
+            <a:ext cx="840000" cy="216000"/>
           </a:xfrm>
           <a:prstGeom prst="rect">
             <a:avLst/>
@@ -3438,38 +3772,261 @@
           <a:noFill/>
         </p:spPr>
         <p:txBody>
-          <a:bodyPr wrap="square" lIns="0" rIns="0" tIns="0" bIns="0" anchor="t">
+          <a:bodyPr wrap="square" lIns="0" rIns="0" tIns="0" bIns="0" anchor="ctr">
             <a:spAutoFit/>
           </a:bodyPr>
           <a:lstStyle/>
           <a:p>
             <a:pPr algn="ctr">
               <a:lnSpc>
-                <a:spcPts val="1739"/>
+                <a:spcPts val="1015"/>
               </a:lnSpc>
             </a:pPr>
             <a:r>
-              <a:rPr sz="1200" b="1">
+              <a:rPr sz="700" b="1">
                 <a:solidFill>
                   <a:srgbClr val="12151C"/>
                 </a:solidFill>
                 <a:latin typeface="맑은 고딕"/>
                 <a:ea typeface="맑은 고딕"/>
               </a:rPr>
-              <a:t>작업실의 불빛은 꺼지지 않습니다</a:t>
-            </a:r>
-          </a:p>
-        </p:txBody>
-      </p:sp>
-      <p:sp>
-        <p:nvSpPr>
-          <p:cNvPr id="4" name="텍스트"/>
+              <a:t>브랜딩</a:t>
+            </a:r>
+          </a:p>
+        </p:txBody>
+      </p:sp>
+      <p:sp>
+        <p:nvSpPr>
+          <p:cNvPr id="13" name="텍스트"/>
           <p:cNvSpPr txBox="1"/>
           <p:nvPr/>
         </p:nvSpPr>
         <p:spPr>
           <a:xfrm>
-            <a:off x="360000" y="1339200"/>
+            <a:off x="1200000" y="684000"/>
+            <a:ext cx="840000" cy="216000"/>
+          </a:xfrm>
+          <a:prstGeom prst="rect">
+            <a:avLst/>
+          </a:prstGeom>
+          <a:noFill/>
+        </p:spPr>
+        <p:txBody>
+          <a:bodyPr wrap="square" lIns="0" rIns="0" tIns="0" bIns="0" anchor="ctr">
+            <a:spAutoFit/>
+          </a:bodyPr>
+          <a:lstStyle/>
+          <a:p>
+            <a:pPr algn="ctr">
+              <a:lnSpc>
+                <a:spcPts val="1015"/>
+              </a:lnSpc>
+            </a:pPr>
+            <a:r>
+              <a:rPr sz="700" b="1">
+                <a:solidFill>
+                  <a:srgbClr val="12151C"/>
+                </a:solidFill>
+                <a:latin typeface="맑은 고딕"/>
+                <a:ea typeface="맑은 고딕"/>
+              </a:rPr>
+              <a:t>영상 편집</a:t>
+            </a:r>
+          </a:p>
+        </p:txBody>
+      </p:sp>
+      <p:cxnSp>
+        <p:nvCxnSpPr>
+          <p:cNvPr id="14" name="Connector 13"/>
+          <p:cNvCxnSpPr/>
+          <p:nvPr/>
+        </p:nvCxnSpPr>
+        <p:spPr>
+          <a:xfrm>
+            <a:off x="1200000" y="676800"/>
+            <a:ext cx="0" cy="230400"/>
+          </a:xfrm>
+          <a:prstGeom prst="line">
+            <a:avLst/>
+          </a:prstGeom>
+          <a:ln w="3600">
+            <a:solidFill>
+              <a:srgbClr val="E3E5E9"/>
+            </a:solidFill>
+          </a:ln>
+        </p:spPr>
+      </p:cxnSp>
+      <p:sp>
+        <p:nvSpPr>
+          <p:cNvPr id="15" name="텍스트"/>
+          <p:cNvSpPr txBox="1"/>
+          <p:nvPr/>
+        </p:nvSpPr>
+        <p:spPr>
+          <a:xfrm>
+            <a:off x="2040000" y="684000"/>
+            <a:ext cx="840000" cy="216000"/>
+          </a:xfrm>
+          <a:prstGeom prst="rect">
+            <a:avLst/>
+          </a:prstGeom>
+          <a:noFill/>
+        </p:spPr>
+        <p:txBody>
+          <a:bodyPr wrap="square" lIns="0" rIns="0" tIns="0" bIns="0" anchor="ctr">
+            <a:spAutoFit/>
+          </a:bodyPr>
+          <a:lstStyle/>
+          <a:p>
+            <a:pPr algn="ctr">
+              <a:lnSpc>
+                <a:spcPts val="1015"/>
+              </a:lnSpc>
+            </a:pPr>
+            <a:r>
+              <a:rPr sz="700" b="1">
+                <a:solidFill>
+                  <a:srgbClr val="12151C"/>
+                </a:solidFill>
+                <a:latin typeface="맑은 고딕"/>
+                <a:ea typeface="맑은 고딕"/>
+              </a:rPr>
+              <a:t>캘리그라피</a:t>
+            </a:r>
+          </a:p>
+        </p:txBody>
+      </p:sp>
+      <p:cxnSp>
+        <p:nvCxnSpPr>
+          <p:cNvPr id="16" name="Connector 15"/>
+          <p:cNvCxnSpPr/>
+          <p:nvPr/>
+        </p:nvCxnSpPr>
+        <p:spPr>
+          <a:xfrm>
+            <a:off x="2040000" y="676800"/>
+            <a:ext cx="0" cy="230400"/>
+          </a:xfrm>
+          <a:prstGeom prst="line">
+            <a:avLst/>
+          </a:prstGeom>
+          <a:ln w="3600">
+            <a:solidFill>
+              <a:srgbClr val="E3E5E9"/>
+            </a:solidFill>
+          </a:ln>
+        </p:spPr>
+      </p:cxnSp>
+      <p:cxnSp>
+        <p:nvCxnSpPr>
+          <p:cNvPr id="17" name="Connector 16"/>
+          <p:cNvCxnSpPr/>
+          <p:nvPr/>
+        </p:nvCxnSpPr>
+        <p:spPr>
+          <a:xfrm>
+            <a:off x="360000" y="1159200"/>
+            <a:ext cx="2520000" cy="0"/>
+          </a:xfrm>
+          <a:prstGeom prst="line">
+            <a:avLst/>
+          </a:prstGeom>
+          <a:ln w="3600">
+            <a:solidFill>
+              <a:srgbClr val="E3E5E9"/>
+            </a:solidFill>
+          </a:ln>
+        </p:spPr>
+      </p:cxnSp>
+      <p:sp>
+        <p:nvSpPr>
+          <p:cNvPr id="18" name="텍스트"/>
+          <p:cNvSpPr txBox="1"/>
+          <p:nvPr/>
+        </p:nvSpPr>
+        <p:spPr>
+          <a:xfrm>
+            <a:off x="360000" y="1245600"/>
+            <a:ext cx="1224000" cy="118111"/>
+          </a:xfrm>
+          <a:prstGeom prst="rect">
+            <a:avLst/>
+          </a:prstGeom>
+          <a:noFill/>
+        </p:spPr>
+        <p:txBody>
+          <a:bodyPr wrap="square" lIns="0" rIns="0" tIns="0" bIns="0" anchor="t">
+            <a:spAutoFit/>
+          </a:bodyPr>
+          <a:lstStyle/>
+          <a:p>
+            <a:pPr algn="ctr">
+              <a:lnSpc>
+                <a:spcPts val="899"/>
+              </a:lnSpc>
+            </a:pPr>
+            <a:r>
+              <a:rPr sz="620" b="0">
+                <a:solidFill>
+                  <a:srgbClr val="12151C"/>
+                </a:solidFill>
+                <a:latin typeface="맑은 고딕"/>
+                <a:ea typeface="맑은 고딕"/>
+              </a:rPr>
+              <a:t>예약 후 방문</a:t>
+            </a:r>
+          </a:p>
+        </p:txBody>
+      </p:sp>
+      <p:sp>
+        <p:nvSpPr>
+          <p:cNvPr id="19" name="텍스트"/>
+          <p:cNvSpPr txBox="1"/>
+          <p:nvPr/>
+        </p:nvSpPr>
+        <p:spPr>
+          <a:xfrm>
+            <a:off x="1656000" y="1245600"/>
+            <a:ext cx="1224000" cy="118111"/>
+          </a:xfrm>
+          <a:prstGeom prst="rect">
+            <a:avLst/>
+          </a:prstGeom>
+          <a:noFill/>
+        </p:spPr>
+        <p:txBody>
+          <a:bodyPr wrap="square" lIns="0" rIns="0" tIns="0" bIns="0" anchor="t">
+            <a:spAutoFit/>
+          </a:bodyPr>
+          <a:lstStyle/>
+          <a:p>
+            <a:pPr algn="ctr">
+              <a:lnSpc>
+                <a:spcPts val="899"/>
+              </a:lnSpc>
+            </a:pPr>
+            <a:r>
+              <a:rPr sz="620" b="0">
+                <a:solidFill>
+                  <a:srgbClr val="12151C"/>
+                </a:solidFill>
+                <a:latin typeface="맑은 고딕"/>
+                <a:ea typeface="맑은 고딕"/>
+              </a:rPr>
+              <a:t>KAKAO  @채널아이디</a:t>
+            </a:r>
+          </a:p>
+        </p:txBody>
+      </p:sp>
+      <p:sp>
+        <p:nvSpPr>
+          <p:cNvPr id="20" name="텍스트"/>
+          <p:cNvSpPr txBox="1"/>
+          <p:nvPr/>
+        </p:nvSpPr>
+        <p:spPr>
+          <a:xfrm>
+            <a:off x="360000" y="1526400"/>
             <a:ext cx="2520000" cy="123826"/>
           </a:xfrm>
           <a:prstGeom prst="rect">
@@ -3489,7 +4046,7 @@
               </a:lnSpc>
             </a:pPr>
             <a:r>
-              <a:rPr sz="650" b="1" spc="300">
+              <a:rPr sz="650" b="1" spc="220">
                 <a:solidFill>
                   <a:srgbClr val="6B7280"/>
                 </a:solidFill>
